--- a/slides/2-7_arterial_line/2-7_arterial_line.pptx
+++ b/slides/2-7_arterial_line/2-7_arterial_line.pptx
@@ -5009,7 +5009,7 @@
             <a:r>
               <a:rPr lang="ja-JP" altLang="en-US" sz="2800" b="1" dirty="0">
                 <a:solidFill>
-                  <a:srgbClr val="007A7D"/>
+                  <a:srgbClr val="00A8AA"/>
                 </a:solidFill>
                 <a:latin typeface="メイリオ" pitchFamily="34" charset="0"/>
                 <a:ea typeface="メイリオ" pitchFamily="34" charset="-122"/>
@@ -5041,7 +5041,7 @@
             <a:r>
               <a:rPr lang="ja-JP" altLang="en-US" sz="2800" b="1" dirty="0">
                 <a:solidFill>
-                  <a:srgbClr val="007A7D"/>
+                  <a:srgbClr val="00A8AA"/>
                 </a:solidFill>
                 <a:latin typeface="メイリオ" pitchFamily="34" charset="0"/>
                 <a:ea typeface="メイリオ" pitchFamily="34" charset="-122"/>
@@ -5608,7 +5608,7 @@
             <a:r>
               <a:rPr lang="ja-JP" altLang="en-US" sz="3200" b="1" dirty="0">
                 <a:solidFill>
-                  <a:srgbClr val="007A7D"/>
+                  <a:srgbClr val="00A8AA"/>
                 </a:solidFill>
                 <a:latin typeface="メイリオ" pitchFamily="34" charset="0"/>
                 <a:ea typeface="メイリオ" pitchFamily="34" charset="-122"/>
@@ -5630,7 +5630,7 @@
             <a:r>
               <a:rPr lang="ja-JP" altLang="en-US" sz="3200" b="1" dirty="0">
                 <a:solidFill>
-                  <a:srgbClr val="007A7D"/>
+                  <a:srgbClr val="00A8AA"/>
                 </a:solidFill>
                 <a:latin typeface="メイリオ" pitchFamily="34" charset="0"/>
                 <a:ea typeface="メイリオ" pitchFamily="34" charset="-122"/>
@@ -5730,7 +5730,7 @@
             <a:r>
               <a:rPr lang="ja-JP" altLang="en-US" sz="3200" b="1" dirty="0">
                 <a:solidFill>
-                  <a:srgbClr val="007A7D"/>
+                  <a:srgbClr val="00A8AA"/>
                 </a:solidFill>
                 <a:latin typeface="メイリオ" pitchFamily="34" charset="0"/>
                 <a:ea typeface="メイリオ" pitchFamily="34" charset="-122"/>
@@ -5819,7 +5819,7 @@
             <a:r>
               <a:rPr lang="ja-JP" altLang="en-US" sz="3200" b="1" dirty="0">
                 <a:solidFill>
-                  <a:srgbClr val="007A7D"/>
+                  <a:srgbClr val="00A8AA"/>
                 </a:solidFill>
                 <a:latin typeface="メイリオ" pitchFamily="34" charset="0"/>
                 <a:ea typeface="メイリオ" pitchFamily="34" charset="-122"/>
@@ -8896,7 +8896,7 @@
             <a:r>
               <a:rPr lang="ja-JP" altLang="en-US" sz="2200" b="1" dirty="0">
                 <a:solidFill>
-                  <a:srgbClr val="007A7D"/>
+                  <a:srgbClr val="00A8AA"/>
                 </a:solidFill>
                 <a:latin typeface="メイリオ" pitchFamily="34" charset="0"/>
                 <a:ea typeface="メイリオ" pitchFamily="34" charset="-122"/>
@@ -12039,7 +12039,7 @@
             <a:r>
               <a:rPr lang="ja-JP" altLang="en-US" sz="2400" b="1" dirty="0">
                 <a:solidFill>
-                  <a:srgbClr val="007A7D"/>
+                  <a:srgbClr val="00A8AA"/>
                 </a:solidFill>
                 <a:latin typeface="メイリオ" pitchFamily="34" charset="0"/>
                 <a:ea typeface="メイリオ" pitchFamily="34" charset="-122"/>
@@ -18223,7 +18223,7 @@
             <a:r>
               <a:rPr lang="ja-JP" altLang="en-US" sz="2200" b="1" dirty="0">
                 <a:solidFill>
-                  <a:srgbClr val="007A7D"/>
+                  <a:srgbClr val="00A8AA"/>
                 </a:solidFill>
                 <a:latin typeface="メイリオ" pitchFamily="34" charset="0"/>
                 <a:ea typeface="メイリオ" pitchFamily="34" charset="-122"/>
@@ -18423,7 +18423,7 @@
             <a:r>
               <a:rPr lang="ja-JP" altLang="en-US" sz="2600" b="1" dirty="0">
                 <a:solidFill>
-                  <a:srgbClr val="007A7D"/>
+                  <a:srgbClr val="00A8AA"/>
                 </a:solidFill>
                 <a:latin typeface="メイリオ" pitchFamily="34" charset="0"/>
                 <a:ea typeface="メイリオ" pitchFamily="34" charset="-122"/>

--- a/slides/2-7_arterial_line/2-7_arterial_line.pptx
+++ b/slides/2-7_arterial_line/2-7_arterial_line.pptx
@@ -2348,7 +2348,7 @@
           <a:ln/>
         </p:spPr>
         <p:txBody>
-          <a:bodyPr wrap="square" lIns="0" tIns="0" rIns="0" bIns="0" rtlCol="0" anchor="ctr"/>
+          <a:bodyPr wrap="none" lIns="0" tIns="0" rIns="0" bIns="0" rtlCol="0" anchor="ctr"/>
           <a:lstStyle/>
           <a:p>
             <a:pPr algn="ctr" indent="0" marL="0">
@@ -2391,7 +2391,7 @@
           <a:ln/>
         </p:spPr>
         <p:txBody>
-          <a:bodyPr wrap="square" lIns="0" tIns="0" rIns="0" bIns="0" rtlCol="0" anchor="ctr"/>
+          <a:bodyPr wrap="none" lIns="0" tIns="0" rIns="0" bIns="0" rtlCol="0" anchor="ctr"/>
           <a:lstStyle/>
           <a:p>
             <a:pPr algn="ctr" indent="0" marL="0">
@@ -2434,7 +2434,7 @@
           <a:ln/>
         </p:spPr>
         <p:txBody>
-          <a:bodyPr wrap="square" lIns="0" tIns="0" rIns="0" bIns="0" rtlCol="0" anchor="ctr"/>
+          <a:bodyPr wrap="none" lIns="0" tIns="0" rIns="0" bIns="0" rtlCol="0" anchor="ctr"/>
           <a:lstStyle/>
           <a:p>
             <a:pPr algn="ctr" indent="0" marL="0">
@@ -2477,7 +2477,7 @@
           <a:ln/>
         </p:spPr>
         <p:txBody>
-          <a:bodyPr wrap="square" lIns="0" tIns="0" rIns="0" bIns="0" rtlCol="0" anchor="ctr"/>
+          <a:bodyPr wrap="none" lIns="0" tIns="0" rIns="0" bIns="0" rtlCol="0" anchor="ctr"/>
           <a:lstStyle/>
           <a:p>
             <a:pPr algn="ctr" indent="0" marL="0">
@@ -2520,7 +2520,7 @@
           <a:ln/>
         </p:spPr>
         <p:txBody>
-          <a:bodyPr wrap="square" lIns="0" tIns="0" rIns="0" bIns="0" rtlCol="0" anchor="ctr"/>
+          <a:bodyPr wrap="none" lIns="0" tIns="0" rIns="0" bIns="0" rtlCol="0" anchor="ctr"/>
           <a:lstStyle/>
           <a:p>
             <a:pPr algn="ctr" indent="0" marL="0">
@@ -5182,7 +5182,7 @@
           <a:ln/>
         </p:spPr>
         <p:txBody>
-          <a:bodyPr wrap="square" lIns="0" tIns="0" rIns="0" bIns="0" rtlCol="0" anchor="ctr"/>
+          <a:bodyPr wrap="none" lIns="0" tIns="0" rIns="0" bIns="0" rtlCol="0" anchor="ctr"/>
           <a:lstStyle/>
           <a:p>
             <a:pPr algn="ctr" indent="0" marL="0">
@@ -5225,7 +5225,7 @@
           <a:ln/>
         </p:spPr>
         <p:txBody>
-          <a:bodyPr wrap="square" lIns="0" tIns="0" rIns="0" bIns="0" rtlCol="0" anchor="ctr"/>
+          <a:bodyPr wrap="none" lIns="0" tIns="0" rIns="0" bIns="0" rtlCol="0" anchor="ctr"/>
           <a:lstStyle/>
           <a:p>
             <a:pPr algn="ctr" indent="0" marL="0">
@@ -5268,7 +5268,7 @@
           <a:ln/>
         </p:spPr>
         <p:txBody>
-          <a:bodyPr wrap="square" lIns="0" tIns="0" rIns="0" bIns="0" rtlCol="0" anchor="ctr"/>
+          <a:bodyPr wrap="none" lIns="0" tIns="0" rIns="0" bIns="0" rtlCol="0" anchor="ctr"/>
           <a:lstStyle/>
           <a:p>
             <a:pPr algn="ctr" indent="0" marL="0">
@@ -5311,7 +5311,7 @@
           <a:ln/>
         </p:spPr>
         <p:txBody>
-          <a:bodyPr wrap="square" lIns="0" tIns="0" rIns="0" bIns="0" rtlCol="0" anchor="ctr"/>
+          <a:bodyPr wrap="none" lIns="0" tIns="0" rIns="0" bIns="0" rtlCol="0" anchor="ctr"/>
           <a:lstStyle/>
           <a:p>
             <a:pPr algn="ctr" indent="0" marL="0">
@@ -5354,7 +5354,7 @@
           <a:ln/>
         </p:spPr>
         <p:txBody>
-          <a:bodyPr wrap="square" lIns="0" tIns="0" rIns="0" bIns="0" rtlCol="0" anchor="ctr"/>
+          <a:bodyPr wrap="none" lIns="0" tIns="0" rIns="0" bIns="0" rtlCol="0" anchor="ctr"/>
           <a:lstStyle/>
           <a:p>
             <a:pPr algn="ctr" indent="0" marL="0">
@@ -6038,7 +6038,7 @@
           <a:ln/>
         </p:spPr>
         <p:txBody>
-          <a:bodyPr wrap="square" lIns="0" tIns="0" rIns="0" bIns="0" rtlCol="0" anchor="ctr"/>
+          <a:bodyPr wrap="none" lIns="0" tIns="0" rIns="0" bIns="0" rtlCol="0" anchor="ctr"/>
           <a:lstStyle/>
           <a:p>
             <a:pPr algn="ctr" indent="0" marL="0">
@@ -6081,7 +6081,7 @@
           <a:ln/>
         </p:spPr>
         <p:txBody>
-          <a:bodyPr wrap="square" lIns="0" tIns="0" rIns="0" bIns="0" rtlCol="0" anchor="ctr"/>
+          <a:bodyPr wrap="none" lIns="0" tIns="0" rIns="0" bIns="0" rtlCol="0" anchor="ctr"/>
           <a:lstStyle/>
           <a:p>
             <a:pPr algn="ctr" indent="0" marL="0">
@@ -6124,7 +6124,7 @@
           <a:ln/>
         </p:spPr>
         <p:txBody>
-          <a:bodyPr wrap="square" lIns="0" tIns="0" rIns="0" bIns="0" rtlCol="0" anchor="ctr"/>
+          <a:bodyPr wrap="none" lIns="0" tIns="0" rIns="0" bIns="0" rtlCol="0" anchor="ctr"/>
           <a:lstStyle/>
           <a:p>
             <a:pPr algn="ctr" indent="0" marL="0">
@@ -6167,7 +6167,7 @@
           <a:ln/>
         </p:spPr>
         <p:txBody>
-          <a:bodyPr wrap="square" lIns="0" tIns="0" rIns="0" bIns="0" rtlCol="0" anchor="ctr"/>
+          <a:bodyPr wrap="none" lIns="0" tIns="0" rIns="0" bIns="0" rtlCol="0" anchor="ctr"/>
           <a:lstStyle/>
           <a:p>
             <a:pPr algn="ctr" indent="0" marL="0">
@@ -6210,7 +6210,7 @@
           <a:ln/>
         </p:spPr>
         <p:txBody>
-          <a:bodyPr wrap="square" lIns="0" tIns="0" rIns="0" bIns="0" rtlCol="0" anchor="ctr"/>
+          <a:bodyPr wrap="none" lIns="0" tIns="0" rIns="0" bIns="0" rtlCol="0" anchor="ctr"/>
           <a:lstStyle/>
           <a:p>
             <a:pPr algn="ctr" indent="0" marL="0">
@@ -7017,7 +7017,7 @@
           <a:ln/>
         </p:spPr>
         <p:txBody>
-          <a:bodyPr wrap="square" lIns="0" tIns="0" rIns="0" bIns="0" rtlCol="0" anchor="ctr"/>
+          <a:bodyPr wrap="none" lIns="0" tIns="0" rIns="0" bIns="0" rtlCol="0" anchor="ctr"/>
           <a:lstStyle/>
           <a:p>
             <a:pPr algn="ctr" indent="0" marL="0">
@@ -7060,7 +7060,7 @@
           <a:ln/>
         </p:spPr>
         <p:txBody>
-          <a:bodyPr wrap="square" lIns="0" tIns="0" rIns="0" bIns="0" rtlCol="0" anchor="ctr"/>
+          <a:bodyPr wrap="none" lIns="0" tIns="0" rIns="0" bIns="0" rtlCol="0" anchor="ctr"/>
           <a:lstStyle/>
           <a:p>
             <a:pPr algn="ctr" indent="0" marL="0">
@@ -7103,7 +7103,7 @@
           <a:ln/>
         </p:spPr>
         <p:txBody>
-          <a:bodyPr wrap="square" lIns="0" tIns="0" rIns="0" bIns="0" rtlCol="0" anchor="ctr"/>
+          <a:bodyPr wrap="none" lIns="0" tIns="0" rIns="0" bIns="0" rtlCol="0" anchor="ctr"/>
           <a:lstStyle/>
           <a:p>
             <a:pPr algn="ctr" indent="0" marL="0">
@@ -7146,7 +7146,7 @@
           <a:ln/>
         </p:spPr>
         <p:txBody>
-          <a:bodyPr wrap="square" lIns="0" tIns="0" rIns="0" bIns="0" rtlCol="0" anchor="ctr"/>
+          <a:bodyPr wrap="none" lIns="0" tIns="0" rIns="0" bIns="0" rtlCol="0" anchor="ctr"/>
           <a:lstStyle/>
           <a:p>
             <a:pPr algn="ctr" indent="0" marL="0">
@@ -7189,7 +7189,7 @@
           <a:ln/>
         </p:spPr>
         <p:txBody>
-          <a:bodyPr wrap="square" lIns="0" tIns="0" rIns="0" bIns="0" rtlCol="0" anchor="ctr"/>
+          <a:bodyPr wrap="none" lIns="0" tIns="0" rIns="0" bIns="0" rtlCol="0" anchor="ctr"/>
           <a:lstStyle/>
           <a:p>
             <a:pPr algn="ctr" indent="0" marL="0">
@@ -8024,7 +8024,7 @@
           <a:ln/>
         </p:spPr>
         <p:txBody>
-          <a:bodyPr wrap="square" lIns="0" tIns="0" rIns="0" bIns="0" rtlCol="0" anchor="ctr"/>
+          <a:bodyPr wrap="none" lIns="0" tIns="0" rIns="0" bIns="0" rtlCol="0" anchor="ctr"/>
           <a:lstStyle/>
           <a:p>
             <a:pPr algn="ctr" indent="0" marL="0">
@@ -8067,7 +8067,7 @@
           <a:ln/>
         </p:spPr>
         <p:txBody>
-          <a:bodyPr wrap="square" lIns="0" tIns="0" rIns="0" bIns="0" rtlCol="0" anchor="ctr"/>
+          <a:bodyPr wrap="none" lIns="0" tIns="0" rIns="0" bIns="0" rtlCol="0" anchor="ctr"/>
           <a:lstStyle/>
           <a:p>
             <a:pPr algn="ctr" indent="0" marL="0">
@@ -8110,7 +8110,7 @@
           <a:ln/>
         </p:spPr>
         <p:txBody>
-          <a:bodyPr wrap="square" lIns="0" tIns="0" rIns="0" bIns="0" rtlCol="0" anchor="ctr"/>
+          <a:bodyPr wrap="none" lIns="0" tIns="0" rIns="0" bIns="0" rtlCol="0" anchor="ctr"/>
           <a:lstStyle/>
           <a:p>
             <a:pPr algn="ctr" indent="0" marL="0">
@@ -8153,7 +8153,7 @@
           <a:ln/>
         </p:spPr>
         <p:txBody>
-          <a:bodyPr wrap="square" lIns="0" tIns="0" rIns="0" bIns="0" rtlCol="0" anchor="ctr"/>
+          <a:bodyPr wrap="none" lIns="0" tIns="0" rIns="0" bIns="0" rtlCol="0" anchor="ctr"/>
           <a:lstStyle/>
           <a:p>
             <a:pPr algn="ctr" indent="0" marL="0">
@@ -8196,7 +8196,7 @@
           <a:ln/>
         </p:spPr>
         <p:txBody>
-          <a:bodyPr wrap="square" lIns="0" tIns="0" rIns="0" bIns="0" rtlCol="0" anchor="ctr"/>
+          <a:bodyPr wrap="none" lIns="0" tIns="0" rIns="0" bIns="0" rtlCol="0" anchor="ctr"/>
           <a:lstStyle/>
           <a:p>
             <a:pPr algn="ctr" indent="0" marL="0">
@@ -9026,7 +9026,7 @@
           <a:ln/>
         </p:spPr>
         <p:txBody>
-          <a:bodyPr wrap="square" lIns="0" tIns="0" rIns="0" bIns="0" rtlCol="0" anchor="ctr"/>
+          <a:bodyPr wrap="none" lIns="0" tIns="0" rIns="0" bIns="0" rtlCol="0" anchor="ctr"/>
           <a:lstStyle/>
           <a:p>
             <a:pPr algn="ctr" indent="0" marL="0">
@@ -9069,7 +9069,7 @@
           <a:ln/>
         </p:spPr>
         <p:txBody>
-          <a:bodyPr wrap="square" lIns="0" tIns="0" rIns="0" bIns="0" rtlCol="0" anchor="ctr"/>
+          <a:bodyPr wrap="none" lIns="0" tIns="0" rIns="0" bIns="0" rtlCol="0" anchor="ctr"/>
           <a:lstStyle/>
           <a:p>
             <a:pPr algn="ctr" indent="0" marL="0">
@@ -9112,7 +9112,7 @@
           <a:ln/>
         </p:spPr>
         <p:txBody>
-          <a:bodyPr wrap="square" lIns="0" tIns="0" rIns="0" bIns="0" rtlCol="0" anchor="ctr"/>
+          <a:bodyPr wrap="none" lIns="0" tIns="0" rIns="0" bIns="0" rtlCol="0" anchor="ctr"/>
           <a:lstStyle/>
           <a:p>
             <a:pPr algn="ctr" indent="0" marL="0">
@@ -9155,7 +9155,7 @@
           <a:ln/>
         </p:spPr>
         <p:txBody>
-          <a:bodyPr wrap="square" lIns="0" tIns="0" rIns="0" bIns="0" rtlCol="0" anchor="ctr"/>
+          <a:bodyPr wrap="none" lIns="0" tIns="0" rIns="0" bIns="0" rtlCol="0" anchor="ctr"/>
           <a:lstStyle/>
           <a:p>
             <a:pPr algn="ctr" indent="0" marL="0">
@@ -9198,7 +9198,7 @@
           <a:ln/>
         </p:spPr>
         <p:txBody>
-          <a:bodyPr wrap="square" lIns="0" tIns="0" rIns="0" bIns="0" rtlCol="0" anchor="ctr"/>
+          <a:bodyPr wrap="none" lIns="0" tIns="0" rIns="0" bIns="0" rtlCol="0" anchor="ctr"/>
           <a:lstStyle/>
           <a:p>
             <a:pPr algn="ctr" indent="0" marL="0">
@@ -10657,7 +10657,7 @@
           <a:ln/>
         </p:spPr>
         <p:txBody>
-          <a:bodyPr wrap="square" lIns="0" tIns="0" rIns="0" bIns="0" rtlCol="0" anchor="ctr"/>
+          <a:bodyPr wrap="none" lIns="0" tIns="0" rIns="0" bIns="0" rtlCol="0" anchor="ctr"/>
           <a:lstStyle/>
           <a:p>
             <a:pPr algn="ctr" indent="0" marL="0">
@@ -10700,7 +10700,7 @@
           <a:ln/>
         </p:spPr>
         <p:txBody>
-          <a:bodyPr wrap="square" lIns="0" tIns="0" rIns="0" bIns="0" rtlCol="0" anchor="ctr"/>
+          <a:bodyPr wrap="none" lIns="0" tIns="0" rIns="0" bIns="0" rtlCol="0" anchor="ctr"/>
           <a:lstStyle/>
           <a:p>
             <a:pPr algn="ctr" indent="0" marL="0">
@@ -10743,7 +10743,7 @@
           <a:ln/>
         </p:spPr>
         <p:txBody>
-          <a:bodyPr wrap="square" lIns="0" tIns="0" rIns="0" bIns="0" rtlCol="0" anchor="ctr"/>
+          <a:bodyPr wrap="none" lIns="0" tIns="0" rIns="0" bIns="0" rtlCol="0" anchor="ctr"/>
           <a:lstStyle/>
           <a:p>
             <a:pPr algn="ctr" indent="0" marL="0">
@@ -10786,7 +10786,7 @@
           <a:ln/>
         </p:spPr>
         <p:txBody>
-          <a:bodyPr wrap="square" lIns="0" tIns="0" rIns="0" bIns="0" rtlCol="0" anchor="ctr"/>
+          <a:bodyPr wrap="none" lIns="0" tIns="0" rIns="0" bIns="0" rtlCol="0" anchor="ctr"/>
           <a:lstStyle/>
           <a:p>
             <a:pPr algn="ctr" indent="0" marL="0">
@@ -10829,7 +10829,7 @@
           <a:ln/>
         </p:spPr>
         <p:txBody>
-          <a:bodyPr wrap="square" lIns="0" tIns="0" rIns="0" bIns="0" rtlCol="0" anchor="ctr"/>
+          <a:bodyPr wrap="none" lIns="0" tIns="0" rIns="0" bIns="0" rtlCol="0" anchor="ctr"/>
           <a:lstStyle/>
           <a:p>
             <a:pPr algn="ctr" indent="0" marL="0">
@@ -12211,7 +12211,7 @@
           <a:ln/>
         </p:spPr>
         <p:txBody>
-          <a:bodyPr wrap="square" lIns="0" tIns="0" rIns="0" bIns="0" rtlCol="0" anchor="ctr"/>
+          <a:bodyPr wrap="none" lIns="0" tIns="0" rIns="0" bIns="0" rtlCol="0" anchor="ctr"/>
           <a:lstStyle/>
           <a:p>
             <a:pPr algn="ctr" indent="0" marL="0">
@@ -12254,7 +12254,7 @@
           <a:ln/>
         </p:spPr>
         <p:txBody>
-          <a:bodyPr wrap="square" lIns="0" tIns="0" rIns="0" bIns="0" rtlCol="0" anchor="ctr"/>
+          <a:bodyPr wrap="none" lIns="0" tIns="0" rIns="0" bIns="0" rtlCol="0" anchor="ctr"/>
           <a:lstStyle/>
           <a:p>
             <a:pPr algn="ctr" indent="0" marL="0">
@@ -12297,7 +12297,7 @@
           <a:ln/>
         </p:spPr>
         <p:txBody>
-          <a:bodyPr wrap="square" lIns="0" tIns="0" rIns="0" bIns="0" rtlCol="0" anchor="ctr"/>
+          <a:bodyPr wrap="none" lIns="0" tIns="0" rIns="0" bIns="0" rtlCol="0" anchor="ctr"/>
           <a:lstStyle/>
           <a:p>
             <a:pPr algn="ctr" indent="0" marL="0">
@@ -12340,7 +12340,7 @@
           <a:ln/>
         </p:spPr>
         <p:txBody>
-          <a:bodyPr wrap="square" lIns="0" tIns="0" rIns="0" bIns="0" rtlCol="0" anchor="ctr"/>
+          <a:bodyPr wrap="none" lIns="0" tIns="0" rIns="0" bIns="0" rtlCol="0" anchor="ctr"/>
           <a:lstStyle/>
           <a:p>
             <a:pPr algn="ctr" indent="0" marL="0">
@@ -12383,7 +12383,7 @@
           <a:ln/>
         </p:spPr>
         <p:txBody>
-          <a:bodyPr wrap="square" lIns="0" tIns="0" rIns="0" bIns="0" rtlCol="0" anchor="ctr"/>
+          <a:bodyPr wrap="none" lIns="0" tIns="0" rIns="0" bIns="0" rtlCol="0" anchor="ctr"/>
           <a:lstStyle/>
           <a:p>
             <a:pPr algn="ctr" indent="0" marL="0">
@@ -18695,7 +18695,7 @@
           <a:ln/>
         </p:spPr>
         <p:txBody>
-          <a:bodyPr wrap="square" lIns="0" tIns="0" rIns="0" bIns="0" rtlCol="0" anchor="ctr"/>
+          <a:bodyPr wrap="none" lIns="0" tIns="0" rIns="0" bIns="0" rtlCol="0" anchor="ctr"/>
           <a:lstStyle/>
           <a:p>
             <a:pPr algn="ctr" indent="0" marL="0">
@@ -18738,7 +18738,7 @@
           <a:ln/>
         </p:spPr>
         <p:txBody>
-          <a:bodyPr wrap="square" lIns="0" tIns="0" rIns="0" bIns="0" rtlCol="0" anchor="ctr"/>
+          <a:bodyPr wrap="none" lIns="0" tIns="0" rIns="0" bIns="0" rtlCol="0" anchor="ctr"/>
           <a:lstStyle/>
           <a:p>
             <a:pPr algn="ctr" indent="0" marL="0">
@@ -18781,7 +18781,7 @@
           <a:ln/>
         </p:spPr>
         <p:txBody>
-          <a:bodyPr wrap="square" lIns="0" tIns="0" rIns="0" bIns="0" rtlCol="0" anchor="ctr"/>
+          <a:bodyPr wrap="none" lIns="0" tIns="0" rIns="0" bIns="0" rtlCol="0" anchor="ctr"/>
           <a:lstStyle/>
           <a:p>
             <a:pPr algn="ctr" indent="0" marL="0">
@@ -18824,7 +18824,7 @@
           <a:ln/>
         </p:spPr>
         <p:txBody>
-          <a:bodyPr wrap="square" lIns="0" tIns="0" rIns="0" bIns="0" rtlCol="0" anchor="ctr"/>
+          <a:bodyPr wrap="none" lIns="0" tIns="0" rIns="0" bIns="0" rtlCol="0" anchor="ctr"/>
           <a:lstStyle/>
           <a:p>
             <a:pPr algn="ctr" indent="0" marL="0">
@@ -18867,7 +18867,7 @@
           <a:ln/>
         </p:spPr>
         <p:txBody>
-          <a:bodyPr wrap="square" lIns="0" tIns="0" rIns="0" bIns="0" rtlCol="0" anchor="ctr"/>
+          <a:bodyPr wrap="none" lIns="0" tIns="0" rIns="0" bIns="0" rtlCol="0" anchor="ctr"/>
           <a:lstStyle/>
           <a:p>
             <a:pPr algn="ctr" indent="0" marL="0">
@@ -19650,7 +19650,7 @@
           <a:ln/>
         </p:spPr>
         <p:txBody>
-          <a:bodyPr wrap="square" lIns="0" tIns="0" rIns="0" bIns="0" rtlCol="0" anchor="ctr"/>
+          <a:bodyPr wrap="none" lIns="0" tIns="0" rIns="0" bIns="0" rtlCol="0" anchor="ctr"/>
           <a:lstStyle/>
           <a:p>
             <a:pPr algn="ctr" indent="0" marL="0">
@@ -19693,7 +19693,7 @@
           <a:ln/>
         </p:spPr>
         <p:txBody>
-          <a:bodyPr wrap="square" lIns="0" tIns="0" rIns="0" bIns="0" rtlCol="0" anchor="ctr"/>
+          <a:bodyPr wrap="none" lIns="0" tIns="0" rIns="0" bIns="0" rtlCol="0" anchor="ctr"/>
           <a:lstStyle/>
           <a:p>
             <a:pPr algn="ctr" indent="0" marL="0">
@@ -19736,7 +19736,7 @@
           <a:ln/>
         </p:spPr>
         <p:txBody>
-          <a:bodyPr wrap="square" lIns="0" tIns="0" rIns="0" bIns="0" rtlCol="0" anchor="ctr"/>
+          <a:bodyPr wrap="none" lIns="0" tIns="0" rIns="0" bIns="0" rtlCol="0" anchor="ctr"/>
           <a:lstStyle/>
           <a:p>
             <a:pPr algn="ctr" indent="0" marL="0">
@@ -19779,7 +19779,7 @@
           <a:ln/>
         </p:spPr>
         <p:txBody>
-          <a:bodyPr wrap="square" lIns="0" tIns="0" rIns="0" bIns="0" rtlCol="0" anchor="ctr"/>
+          <a:bodyPr wrap="none" lIns="0" tIns="0" rIns="0" bIns="0" rtlCol="0" anchor="ctr"/>
           <a:lstStyle/>
           <a:p>
             <a:pPr algn="ctr" indent="0" marL="0">
@@ -19822,7 +19822,7 @@
           <a:ln/>
         </p:spPr>
         <p:txBody>
-          <a:bodyPr wrap="square" lIns="0" tIns="0" rIns="0" bIns="0" rtlCol="0" anchor="ctr"/>
+          <a:bodyPr wrap="none" lIns="0" tIns="0" rIns="0" bIns="0" rtlCol="0" anchor="ctr"/>
           <a:lstStyle/>
           <a:p>
             <a:pPr algn="ctr" indent="0" marL="0">
